--- a/bannerprova.pptx
+++ b/bannerprova.pptx
@@ -109,6 +109,11 @@
       </a:defRPr>
     </a:lvl9pPr>
   </p:defaultTextStyle>
+  <p:extLst>
+    <p:ext uri="{EFAFB233-063F-42B5-8137-9DF3F51BA10A}">
+      <p15:sldGuideLst xmlns:p15="http://schemas.microsoft.com/office/powerpoint/2012/main"/>
+    </p:ext>
+  </p:extLst>
 </p:presentation>
 </file>
 
@@ -194,7 +199,7 @@
           <a:p>
             <a:fld id="{B22422A7-FDE0-4975-9E40-F3A6F1F6AB50}" type="datetimeFigureOut">
               <a:rPr lang="pt-BR" smtClean="0"/>
-              <a:t>28/08/2026</a:t>
+              <a:t>03/09/2026</a:t>
             </a:fld>
             <a:endParaRPr lang="pt-BR"/>
           </a:p>
@@ -676,7 +681,7 @@
           <a:p>
             <a:fld id="{708B891E-F250-4B88-A4BD-C66843511560}" type="datetimeFigureOut">
               <a:rPr lang="pt-BR" smtClean="0"/>
-              <a:t>28/08/2026</a:t>
+              <a:t>03/09/2026</a:t>
             </a:fld>
             <a:endParaRPr lang="pt-BR"/>
           </a:p>
@@ -846,7 +851,7 @@
           <a:p>
             <a:fld id="{708B891E-F250-4B88-A4BD-C66843511560}" type="datetimeFigureOut">
               <a:rPr lang="pt-BR" smtClean="0"/>
-              <a:t>28/08/2026</a:t>
+              <a:t>03/09/2026</a:t>
             </a:fld>
             <a:endParaRPr lang="pt-BR"/>
           </a:p>
@@ -1026,7 +1031,7 @@
           <a:p>
             <a:fld id="{708B891E-F250-4B88-A4BD-C66843511560}" type="datetimeFigureOut">
               <a:rPr lang="pt-BR" smtClean="0"/>
-              <a:t>28/08/2026</a:t>
+              <a:t>03/09/2026</a:t>
             </a:fld>
             <a:endParaRPr lang="pt-BR"/>
           </a:p>
@@ -1196,7 +1201,7 @@
           <a:p>
             <a:fld id="{708B891E-F250-4B88-A4BD-C66843511560}" type="datetimeFigureOut">
               <a:rPr lang="pt-BR" smtClean="0"/>
-              <a:t>28/08/2026</a:t>
+              <a:t>03/09/2026</a:t>
             </a:fld>
             <a:endParaRPr lang="pt-BR"/>
           </a:p>
@@ -1442,7 +1447,7 @@
           <a:p>
             <a:fld id="{708B891E-F250-4B88-A4BD-C66843511560}" type="datetimeFigureOut">
               <a:rPr lang="pt-BR" smtClean="0"/>
-              <a:t>28/08/2026</a:t>
+              <a:t>03/09/2026</a:t>
             </a:fld>
             <a:endParaRPr lang="pt-BR"/>
           </a:p>
@@ -1674,7 +1679,7 @@
           <a:p>
             <a:fld id="{708B891E-F250-4B88-A4BD-C66843511560}" type="datetimeFigureOut">
               <a:rPr lang="pt-BR" smtClean="0"/>
-              <a:t>28/08/2026</a:t>
+              <a:t>03/09/2026</a:t>
             </a:fld>
             <a:endParaRPr lang="pt-BR"/>
           </a:p>
@@ -2041,7 +2046,7 @@
           <a:p>
             <a:fld id="{708B891E-F250-4B88-A4BD-C66843511560}" type="datetimeFigureOut">
               <a:rPr lang="pt-BR" smtClean="0"/>
-              <a:t>28/08/2026</a:t>
+              <a:t>03/09/2026</a:t>
             </a:fld>
             <a:endParaRPr lang="pt-BR"/>
           </a:p>
@@ -2159,7 +2164,7 @@
           <a:p>
             <a:fld id="{708B891E-F250-4B88-A4BD-C66843511560}" type="datetimeFigureOut">
               <a:rPr lang="pt-BR" smtClean="0"/>
-              <a:t>28/08/2026</a:t>
+              <a:t>03/09/2026</a:t>
             </a:fld>
             <a:endParaRPr lang="pt-BR"/>
           </a:p>
@@ -2254,7 +2259,7 @@
           <a:p>
             <a:fld id="{708B891E-F250-4B88-A4BD-C66843511560}" type="datetimeFigureOut">
               <a:rPr lang="pt-BR" smtClean="0"/>
-              <a:t>28/08/2026</a:t>
+              <a:t>03/09/2026</a:t>
             </a:fld>
             <a:endParaRPr lang="pt-BR"/>
           </a:p>
@@ -2531,7 +2536,7 @@
           <a:p>
             <a:fld id="{708B891E-F250-4B88-A4BD-C66843511560}" type="datetimeFigureOut">
               <a:rPr lang="pt-BR" smtClean="0"/>
-              <a:t>28/08/2026</a:t>
+              <a:t>03/09/2026</a:t>
             </a:fld>
             <a:endParaRPr lang="pt-BR"/>
           </a:p>
@@ -2788,7 +2793,7 @@
           <a:p>
             <a:fld id="{708B891E-F250-4B88-A4BD-C66843511560}" type="datetimeFigureOut">
               <a:rPr lang="pt-BR" smtClean="0"/>
-              <a:t>28/08/2026</a:t>
+              <a:t>03/09/2026</a:t>
             </a:fld>
             <a:endParaRPr lang="pt-BR"/>
           </a:p>
@@ -3001,7 +3006,7 @@
           <a:p>
             <a:fld id="{708B891E-F250-4B88-A4BD-C66843511560}" type="datetimeFigureOut">
               <a:rPr lang="pt-BR" smtClean="0"/>
-              <a:t>28/08/2026</a:t>
+              <a:t>03/09/2026</a:t>
             </a:fld>
             <a:endParaRPr lang="pt-BR"/>
           </a:p>
@@ -3721,6 +3726,229 @@
   <p:clrMapOvr>
     <a:masterClrMapping/>
   </p:clrMapOvr>
+  <p:timing>
+    <p:tnLst>
+      <p:par>
+        <p:cTn id="1" dur="indefinite" restart="never" nodeType="tmRoot">
+          <p:childTnLst>
+            <p:seq concurrent="1" nextAc="seek">
+              <p:cTn id="2" dur="indefinite" nodeType="mainSeq">
+                <p:childTnLst>
+                  <p:par>
+                    <p:cTn id="3" fill="hold">
+                      <p:stCondLst>
+                        <p:cond delay="indefinite"/>
+                      </p:stCondLst>
+                      <p:childTnLst>
+                        <p:par>
+                          <p:cTn id="4" fill="hold">
+                            <p:stCondLst>
+                              <p:cond delay="0"/>
+                            </p:stCondLst>
+                            <p:childTnLst>
+                              <p:par>
+                                <p:cTn id="5" presetID="42" presetClass="entr" presetSubtype="0" fill="hold" grpId="0" nodeType="clickEffect">
+                                  <p:stCondLst>
+                                    <p:cond delay="0"/>
+                                  </p:stCondLst>
+                                  <p:childTnLst>
+                                    <p:set>
+                                      <p:cBhvr>
+                                        <p:cTn id="6" dur="1" fill="hold">
+                                          <p:stCondLst>
+                                            <p:cond delay="0"/>
+                                          </p:stCondLst>
+                                        </p:cTn>
+                                        <p:tgtEl>
+                                          <p:spTgt spid="25"/>
+                                        </p:tgtEl>
+                                        <p:attrNameLst>
+                                          <p:attrName>style.visibility</p:attrName>
+                                        </p:attrNameLst>
+                                      </p:cBhvr>
+                                      <p:to>
+                                        <p:strVal val="visible"/>
+                                      </p:to>
+                                    </p:set>
+                                    <p:animEffect transition="in" filter="fade">
+                                      <p:cBhvr>
+                                        <p:cTn id="7" dur="4500"/>
+                                        <p:tgtEl>
+                                          <p:spTgt spid="25"/>
+                                        </p:tgtEl>
+                                      </p:cBhvr>
+                                    </p:animEffect>
+                                    <p:anim calcmode="lin" valueType="num">
+                                      <p:cBhvr>
+                                        <p:cTn id="8" dur="4500" fill="hold"/>
+                                        <p:tgtEl>
+                                          <p:spTgt spid="25"/>
+                                        </p:tgtEl>
+                                        <p:attrNameLst>
+                                          <p:attrName>ppt_x</p:attrName>
+                                        </p:attrNameLst>
+                                      </p:cBhvr>
+                                      <p:tavLst>
+                                        <p:tav tm="0">
+                                          <p:val>
+                                            <p:strVal val="#ppt_x"/>
+                                          </p:val>
+                                        </p:tav>
+                                        <p:tav tm="100000">
+                                          <p:val>
+                                            <p:strVal val="#ppt_x"/>
+                                          </p:val>
+                                        </p:tav>
+                                      </p:tavLst>
+                                    </p:anim>
+                                    <p:anim calcmode="lin" valueType="num">
+                                      <p:cBhvr>
+                                        <p:cTn id="9" dur="4500" fill="hold"/>
+                                        <p:tgtEl>
+                                          <p:spTgt spid="25"/>
+                                        </p:tgtEl>
+                                        <p:attrNameLst>
+                                          <p:attrName>ppt_y</p:attrName>
+                                        </p:attrNameLst>
+                                      </p:cBhvr>
+                                      <p:tavLst>
+                                        <p:tav tm="0">
+                                          <p:val>
+                                            <p:strVal val="#ppt_y+.1"/>
+                                          </p:val>
+                                        </p:tav>
+                                        <p:tav tm="100000">
+                                          <p:val>
+                                            <p:strVal val="#ppt_y"/>
+                                          </p:val>
+                                        </p:tav>
+                                      </p:tavLst>
+                                    </p:anim>
+                                  </p:childTnLst>
+                                </p:cTn>
+                              </p:par>
+                            </p:childTnLst>
+                          </p:cTn>
+                        </p:par>
+                        <p:par>
+                          <p:cTn id="10" fill="hold">
+                            <p:stCondLst>
+                              <p:cond delay="4500"/>
+                            </p:stCondLst>
+                            <p:childTnLst>
+                              <p:par>
+                                <p:cTn id="11" presetID="42" presetClass="entr" presetSubtype="0" fill="hold" grpId="0" nodeType="afterEffect">
+                                  <p:stCondLst>
+                                    <p:cond delay="0"/>
+                                  </p:stCondLst>
+                                  <p:childTnLst>
+                                    <p:set>
+                                      <p:cBhvr>
+                                        <p:cTn id="12" dur="1" fill="hold">
+                                          <p:stCondLst>
+                                            <p:cond delay="0"/>
+                                          </p:stCondLst>
+                                        </p:cTn>
+                                        <p:tgtEl>
+                                          <p:spTgt spid="27"/>
+                                        </p:tgtEl>
+                                        <p:attrNameLst>
+                                          <p:attrName>style.visibility</p:attrName>
+                                        </p:attrNameLst>
+                                      </p:cBhvr>
+                                      <p:to>
+                                        <p:strVal val="visible"/>
+                                      </p:to>
+                                    </p:set>
+                                    <p:animEffect transition="in" filter="fade">
+                                      <p:cBhvr>
+                                        <p:cTn id="13" dur="3300"/>
+                                        <p:tgtEl>
+                                          <p:spTgt spid="27"/>
+                                        </p:tgtEl>
+                                      </p:cBhvr>
+                                    </p:animEffect>
+                                    <p:anim calcmode="lin" valueType="num">
+                                      <p:cBhvr>
+                                        <p:cTn id="14" dur="3300" fill="hold"/>
+                                        <p:tgtEl>
+                                          <p:spTgt spid="27"/>
+                                        </p:tgtEl>
+                                        <p:attrNameLst>
+                                          <p:attrName>ppt_x</p:attrName>
+                                        </p:attrNameLst>
+                                      </p:cBhvr>
+                                      <p:tavLst>
+                                        <p:tav tm="0">
+                                          <p:val>
+                                            <p:strVal val="#ppt_x"/>
+                                          </p:val>
+                                        </p:tav>
+                                        <p:tav tm="100000">
+                                          <p:val>
+                                            <p:strVal val="#ppt_x"/>
+                                          </p:val>
+                                        </p:tav>
+                                      </p:tavLst>
+                                    </p:anim>
+                                    <p:anim calcmode="lin" valueType="num">
+                                      <p:cBhvr>
+                                        <p:cTn id="15" dur="3300" fill="hold"/>
+                                        <p:tgtEl>
+                                          <p:spTgt spid="27"/>
+                                        </p:tgtEl>
+                                        <p:attrNameLst>
+                                          <p:attrName>ppt_y</p:attrName>
+                                        </p:attrNameLst>
+                                      </p:cBhvr>
+                                      <p:tavLst>
+                                        <p:tav tm="0">
+                                          <p:val>
+                                            <p:strVal val="#ppt_y+.1"/>
+                                          </p:val>
+                                        </p:tav>
+                                        <p:tav tm="100000">
+                                          <p:val>
+                                            <p:strVal val="#ppt_y"/>
+                                          </p:val>
+                                        </p:tav>
+                                      </p:tavLst>
+                                    </p:anim>
+                                  </p:childTnLst>
+                                </p:cTn>
+                              </p:par>
+                            </p:childTnLst>
+                          </p:cTn>
+                        </p:par>
+                      </p:childTnLst>
+                    </p:cTn>
+                  </p:par>
+                </p:childTnLst>
+              </p:cTn>
+              <p:prevCondLst>
+                <p:cond evt="onPrev" delay="0">
+                  <p:tgtEl>
+                    <p:sldTgt/>
+                  </p:tgtEl>
+                </p:cond>
+              </p:prevCondLst>
+              <p:nextCondLst>
+                <p:cond evt="onNext" delay="0">
+                  <p:tgtEl>
+                    <p:sldTgt/>
+                  </p:tgtEl>
+                </p:cond>
+              </p:nextCondLst>
+            </p:seq>
+          </p:childTnLst>
+        </p:cTn>
+      </p:par>
+    </p:tnLst>
+    <p:bldLst>
+      <p:bldP spid="25" grpId="0"/>
+      <p:bldP spid="27" grpId="0"/>
+    </p:bldLst>
+  </p:timing>
 </p:sld>
 </file>
 
@@ -3827,7 +4055,7 @@
         </p:blipFill>
         <p:spPr>
           <a:xfrm>
-            <a:off x="3756992" y="-428796"/>
+            <a:off x="3735971" y="-428795"/>
             <a:ext cx="1868657" cy="1868657"/>
           </a:xfrm>
           <a:prstGeom prst="rect">
@@ -3845,6 +4073,92 @@
   <p:clrMapOvr>
     <a:masterClrMapping/>
   </p:clrMapOvr>
+  <p:timing>
+    <p:tnLst>
+      <p:par>
+        <p:cTn id="1" dur="indefinite" restart="never" nodeType="tmRoot">
+          <p:childTnLst>
+            <p:seq concurrent="1" nextAc="seek">
+              <p:cTn id="2" dur="indefinite" nodeType="mainSeq">
+                <p:childTnLst>
+                  <p:par>
+                    <p:cTn id="3" fill="hold">
+                      <p:stCondLst>
+                        <p:cond delay="indefinite"/>
+                        <p:cond evt="onBegin" delay="0">
+                          <p:tn val="2"/>
+                        </p:cond>
+                      </p:stCondLst>
+                      <p:childTnLst>
+                        <p:par>
+                          <p:cTn id="4" fill="hold">
+                            <p:stCondLst>
+                              <p:cond delay="0"/>
+                            </p:stCondLst>
+                            <p:childTnLst>
+                              <p:par>
+                                <p:cTn id="5" presetID="10" presetClass="entr" presetSubtype="0" fill="hold" nodeType="withEffect">
+                                  <p:stCondLst>
+                                    <p:cond delay="0"/>
+                                  </p:stCondLst>
+                                  <p:childTnLst>
+                                    <p:set>
+                                      <p:cBhvr>
+                                        <p:cTn id="6" dur="1" fill="hold">
+                                          <p:stCondLst>
+                                            <p:cond delay="0"/>
+                                          </p:stCondLst>
+                                        </p:cTn>
+                                        <p:tgtEl>
+                                          <p:spTgt spid="12"/>
+                                        </p:tgtEl>
+                                        <p:attrNameLst>
+                                          <p:attrName>style.visibility</p:attrName>
+                                        </p:attrNameLst>
+                                      </p:cBhvr>
+                                      <p:to>
+                                        <p:strVal val="visible"/>
+                                      </p:to>
+                                    </p:set>
+                                    <p:animEffect transition="in" filter="fade">
+                                      <p:cBhvr>
+                                        <p:cTn id="7" dur="7000"/>
+                                        <p:tgtEl>
+                                          <p:spTgt spid="12"/>
+                                        </p:tgtEl>
+                                      </p:cBhvr>
+                                    </p:animEffect>
+                                  </p:childTnLst>
+                                </p:cTn>
+                              </p:par>
+                            </p:childTnLst>
+                          </p:cTn>
+                        </p:par>
+                      </p:childTnLst>
+                    </p:cTn>
+                  </p:par>
+                </p:childTnLst>
+              </p:cTn>
+              <p:prevCondLst>
+                <p:cond evt="onPrev" delay="0">
+                  <p:tgtEl>
+                    <p:sldTgt/>
+                  </p:tgtEl>
+                </p:cond>
+              </p:prevCondLst>
+              <p:nextCondLst>
+                <p:cond evt="onNext" delay="0">
+                  <p:tgtEl>
+                    <p:sldTgt/>
+                  </p:tgtEl>
+                </p:cond>
+              </p:nextCondLst>
+            </p:seq>
+          </p:childTnLst>
+        </p:cTn>
+      </p:par>
+    </p:tnLst>
+  </p:timing>
 </p:sld>
 </file>
 
@@ -4172,6 +4486,211 @@
   <p:clrMapOvr>
     <a:masterClrMapping/>
   </p:clrMapOvr>
+  <p:timing>
+    <p:tnLst>
+      <p:par>
+        <p:cTn id="1" dur="indefinite" restart="never" nodeType="tmRoot">
+          <p:childTnLst>
+            <p:seq concurrent="1" nextAc="seek">
+              <p:cTn id="2" dur="indefinite" nodeType="mainSeq">
+                <p:childTnLst>
+                  <p:par>
+                    <p:cTn id="3" fill="hold">
+                      <p:stCondLst>
+                        <p:cond delay="indefinite"/>
+                        <p:cond evt="onBegin" delay="0">
+                          <p:tn val="2"/>
+                        </p:cond>
+                      </p:stCondLst>
+                      <p:childTnLst>
+                        <p:par>
+                          <p:cTn id="4" fill="hold">
+                            <p:stCondLst>
+                              <p:cond delay="0"/>
+                            </p:stCondLst>
+                            <p:childTnLst>
+                              <p:par>
+                                <p:cTn id="5" presetID="21" presetClass="entr" presetSubtype="1" fill="hold" grpId="0" nodeType="afterEffect">
+                                  <p:stCondLst>
+                                    <p:cond delay="0"/>
+                                  </p:stCondLst>
+                                  <p:childTnLst>
+                                    <p:set>
+                                      <p:cBhvr>
+                                        <p:cTn id="6" dur="1" fill="hold">
+                                          <p:stCondLst>
+                                            <p:cond delay="0"/>
+                                          </p:stCondLst>
+                                        </p:cTn>
+                                        <p:tgtEl>
+                                          <p:spTgt spid="21"/>
+                                        </p:tgtEl>
+                                        <p:attrNameLst>
+                                          <p:attrName>style.visibility</p:attrName>
+                                        </p:attrNameLst>
+                                      </p:cBhvr>
+                                      <p:to>
+                                        <p:strVal val="visible"/>
+                                      </p:to>
+                                    </p:set>
+                                    <p:animEffect transition="in" filter="wheel(1)">
+                                      <p:cBhvr>
+                                        <p:cTn id="7" dur="3000"/>
+                                        <p:tgtEl>
+                                          <p:spTgt spid="21"/>
+                                        </p:tgtEl>
+                                      </p:cBhvr>
+                                    </p:animEffect>
+                                  </p:childTnLst>
+                                </p:cTn>
+                              </p:par>
+                              <p:par>
+                                <p:cTn id="8" presetID="21" presetClass="entr" presetSubtype="1" fill="hold" grpId="0" nodeType="withEffect">
+                                  <p:stCondLst>
+                                    <p:cond delay="0"/>
+                                  </p:stCondLst>
+                                  <p:childTnLst>
+                                    <p:set>
+                                      <p:cBhvr>
+                                        <p:cTn id="9" dur="1" fill="hold">
+                                          <p:stCondLst>
+                                            <p:cond delay="0"/>
+                                          </p:stCondLst>
+                                        </p:cTn>
+                                        <p:tgtEl>
+                                          <p:spTgt spid="22"/>
+                                        </p:tgtEl>
+                                        <p:attrNameLst>
+                                          <p:attrName>style.visibility</p:attrName>
+                                        </p:attrNameLst>
+                                      </p:cBhvr>
+                                      <p:to>
+                                        <p:strVal val="visible"/>
+                                      </p:to>
+                                    </p:set>
+                                    <p:animEffect transition="in" filter="wheel(1)">
+                                      <p:cBhvr>
+                                        <p:cTn id="10" dur="3000"/>
+                                        <p:tgtEl>
+                                          <p:spTgt spid="22"/>
+                                        </p:tgtEl>
+                                      </p:cBhvr>
+                                    </p:animEffect>
+                                  </p:childTnLst>
+                                </p:cTn>
+                              </p:par>
+                            </p:childTnLst>
+                          </p:cTn>
+                        </p:par>
+                        <p:par>
+                          <p:cTn id="11" fill="hold">
+                            <p:stCondLst>
+                              <p:cond delay="3000"/>
+                            </p:stCondLst>
+                            <p:childTnLst>
+                              <p:par>
+                                <p:cTn id="12" presetID="14" presetClass="entr" presetSubtype="10" fill="hold" grpId="0" nodeType="afterEffect">
+                                  <p:stCondLst>
+                                    <p:cond delay="0"/>
+                                  </p:stCondLst>
+                                  <p:childTnLst>
+                                    <p:set>
+                                      <p:cBhvr>
+                                        <p:cTn id="13" dur="1" fill="hold">
+                                          <p:stCondLst>
+                                            <p:cond delay="0"/>
+                                          </p:stCondLst>
+                                        </p:cTn>
+                                        <p:tgtEl>
+                                          <p:spTgt spid="24"/>
+                                        </p:tgtEl>
+                                        <p:attrNameLst>
+                                          <p:attrName>style.visibility</p:attrName>
+                                        </p:attrNameLst>
+                                      </p:cBhvr>
+                                      <p:to>
+                                        <p:strVal val="visible"/>
+                                      </p:to>
+                                    </p:set>
+                                    <p:animEffect transition="in" filter="randombar(horizontal)">
+                                      <p:cBhvr>
+                                        <p:cTn id="14" dur="1000"/>
+                                        <p:tgtEl>
+                                          <p:spTgt spid="24"/>
+                                        </p:tgtEl>
+                                      </p:cBhvr>
+                                    </p:animEffect>
+                                  </p:childTnLst>
+                                </p:cTn>
+                              </p:par>
+                              <p:par>
+                                <p:cTn id="15" presetID="14" presetClass="entr" presetSubtype="10" fill="hold" nodeType="withEffect">
+                                  <p:stCondLst>
+                                    <p:cond delay="0"/>
+                                  </p:stCondLst>
+                                  <p:childTnLst>
+                                    <p:set>
+                                      <p:cBhvr>
+                                        <p:cTn id="16" dur="1" fill="hold">
+                                          <p:stCondLst>
+                                            <p:cond delay="0"/>
+                                          </p:stCondLst>
+                                        </p:cTn>
+                                        <p:tgtEl>
+                                          <p:spTgt spid="30"/>
+                                        </p:tgtEl>
+                                        <p:attrNameLst>
+                                          <p:attrName>style.visibility</p:attrName>
+                                        </p:attrNameLst>
+                                      </p:cBhvr>
+                                      <p:to>
+                                        <p:strVal val="visible"/>
+                                      </p:to>
+                                    </p:set>
+                                    <p:animEffect transition="in" filter="randombar(horizontal)">
+                                      <p:cBhvr>
+                                        <p:cTn id="17" dur="1000"/>
+                                        <p:tgtEl>
+                                          <p:spTgt spid="30"/>
+                                        </p:tgtEl>
+                                      </p:cBhvr>
+                                    </p:animEffect>
+                                  </p:childTnLst>
+                                </p:cTn>
+                              </p:par>
+                            </p:childTnLst>
+                          </p:cTn>
+                        </p:par>
+                      </p:childTnLst>
+                    </p:cTn>
+                  </p:par>
+                </p:childTnLst>
+              </p:cTn>
+              <p:prevCondLst>
+                <p:cond evt="onPrev" delay="0">
+                  <p:tgtEl>
+                    <p:sldTgt/>
+                  </p:tgtEl>
+                </p:cond>
+              </p:prevCondLst>
+              <p:nextCondLst>
+                <p:cond evt="onNext" delay="0">
+                  <p:tgtEl>
+                    <p:sldTgt/>
+                  </p:tgtEl>
+                </p:cond>
+              </p:nextCondLst>
+            </p:seq>
+          </p:childTnLst>
+        </p:cTn>
+      </p:par>
+    </p:tnLst>
+    <p:bldLst>
+      <p:bldP spid="24" grpId="0"/>
+      <p:bldP spid="22" grpId="0"/>
+      <p:bldP spid="21" grpId="0"/>
+    </p:bldLst>
+  </p:timing>
 </p:sld>
 </file>
 
